--- a/docs/presentaciones/classes/clase-125-tfrecord-presentacion.pptx
+++ b/docs/presentaciones/classes/clase-125-tfrecord-presentacion.pptx
@@ -4888,7 +4888,330 @@
                 </a:solidFill>
                 <a:latin typeface="Courier New"/>
               </a:rPr>
-              <a:t># Imports y configuración inicial</a:t>
+              <a:t>import glob</a:t>
+            </a:r>
+          </a:p>
+          <a:p>
+            <a:pPr>
+              <a:defRPr sz="1200" b="0">
+                <a:solidFill>
+                  <a:srgbClr val="F8FAFC"/>
+                </a:solidFill>
+                <a:latin typeface="Courier New"/>
+              </a:defRPr>
+            </a:pPr>
+            <a:r>
+              <a:rPr sz="1200" b="0">
+                <a:solidFill>
+                  <a:srgbClr val="F8FAFC"/>
+                </a:solidFill>
+                <a:latin typeface="Courier New"/>
+              </a:rPr>
+              <a:t>import numpy as np</a:t>
+            </a:r>
+          </a:p>
+          <a:p>
+            <a:pPr>
+              <a:defRPr sz="1200" b="0">
+                <a:solidFill>
+                  <a:srgbClr val="F8FAFC"/>
+                </a:solidFill>
+                <a:latin typeface="Courier New"/>
+              </a:defRPr>
+            </a:pPr>
+            <a:r>
+              <a:rPr sz="1200" b="0">
+                <a:solidFill>
+                  <a:srgbClr val="F8FAFC"/>
+                </a:solidFill>
+                <a:latin typeface="Courier New"/>
+              </a:rPr>
+              <a:t>import tensorflow as tf</a:t>
+            </a:r>
+          </a:p>
+          <a:p>
+            <a:pPr>
+              <a:defRPr sz="1200" b="0">
+                <a:solidFill>
+                  <a:srgbClr val="F8FAFC"/>
+                </a:solidFill>
+                <a:latin typeface="Courier New"/>
+              </a:defRPr>
+            </a:pPr>
+            <a:r>
+              <a:rPr sz="1200" b="0">
+                <a:solidFill>
+                  <a:srgbClr val="F8FAFC"/>
+                </a:solidFill>
+                <a:latin typeface="Courier New"/>
+              </a:rPr>
+              <a:t>from tensorflow import keras</a:t>
+            </a:r>
+          </a:p>
+          <a:p>
+            <a:pPr>
+              <a:defRPr sz="1200" b="0">
+                <a:solidFill>
+                  <a:srgbClr val="F8FAFC"/>
+                </a:solidFill>
+                <a:latin typeface="Courier New"/>
+              </a:defRPr>
+            </a:pPr>
+            <a:r>
+              <a:rPr sz="1200" b="0">
+                <a:solidFill>
+                  <a:srgbClr val="F8FAFC"/>
+                </a:solidFill>
+                <a:latin typeface="Courier New"/>
+              </a:rPr>
+              <a:t>keras.utils.set_random_seed(42)</a:t>
+            </a:r>
+          </a:p>
+          <a:p>
+            <a:pPr>
+              <a:defRPr sz="1200" b="0">
+                <a:solidFill>
+                  <a:srgbClr val="F8FAFC"/>
+                </a:solidFill>
+                <a:latin typeface="Courier New"/>
+              </a:defRPr>
+            </a:pPr>
+            <a:r>
+              <a:rPr sz="1200" b="0">
+                <a:solidFill>
+                  <a:srgbClr val="F8FAFC"/>
+                </a:solidFill>
+                <a:latin typeface="Courier New"/>
+              </a:rPr>
+              <a:t> </a:t>
+            </a:r>
+          </a:p>
+          <a:p>
+            <a:pPr>
+              <a:defRPr sz="1200" b="0">
+                <a:solidFill>
+                  <a:srgbClr val="F8FAFC"/>
+                </a:solidFill>
+                <a:latin typeface="Courier New"/>
+              </a:defRPr>
+            </a:pPr>
+            <a:r>
+              <a:rPr sz="1200" b="0">
+                <a:solidFill>
+                  <a:srgbClr val="F8FAFC"/>
+                </a:solidFill>
+                <a:latin typeface="Courier New"/>
+              </a:rPr>
+              <a:t>def _bytes_feature(valor):</a:t>
+            </a:r>
+          </a:p>
+          <a:p>
+            <a:pPr>
+              <a:defRPr sz="1200" b="0">
+                <a:solidFill>
+                  <a:srgbClr val="F8FAFC"/>
+                </a:solidFill>
+                <a:latin typeface="Courier New"/>
+              </a:defRPr>
+            </a:pPr>
+            <a:r>
+              <a:rPr sz="1200" b="0">
+                <a:solidFill>
+                  <a:srgbClr val="F8FAFC"/>
+                </a:solidFill>
+                <a:latin typeface="Courier New"/>
+              </a:rPr>
+              <a:t>    if isinstance(valor, type(tf.constant(0))):</a:t>
+            </a:r>
+          </a:p>
+          <a:p>
+            <a:pPr>
+              <a:defRPr sz="1200" b="0">
+                <a:solidFill>
+                  <a:srgbClr val="F8FAFC"/>
+                </a:solidFill>
+                <a:latin typeface="Courier New"/>
+              </a:defRPr>
+            </a:pPr>
+            <a:r>
+              <a:rPr sz="1200" b="0">
+                <a:solidFill>
+                  <a:srgbClr val="F8FAFC"/>
+                </a:solidFill>
+                <a:latin typeface="Courier New"/>
+              </a:rPr>
+              <a:t>        valor = valor.numpy()</a:t>
+            </a:r>
+          </a:p>
+          <a:p>
+            <a:pPr>
+              <a:defRPr sz="1200" b="0">
+                <a:solidFill>
+                  <a:srgbClr val="F8FAFC"/>
+                </a:solidFill>
+                <a:latin typeface="Courier New"/>
+              </a:defRPr>
+            </a:pPr>
+            <a:r>
+              <a:rPr sz="1200" b="0">
+                <a:solidFill>
+                  <a:srgbClr val="F8FAFC"/>
+                </a:solidFill>
+                <a:latin typeface="Courier New"/>
+              </a:rPr>
+              <a:t>    return tf.train.Feature(bytes_list=tf.train.BytesList(value=[valor]))</a:t>
+            </a:r>
+          </a:p>
+          <a:p>
+            <a:pPr>
+              <a:defRPr sz="1200" b="0">
+                <a:solidFill>
+                  <a:srgbClr val="F8FAFC"/>
+                </a:solidFill>
+                <a:latin typeface="Courier New"/>
+              </a:defRPr>
+            </a:pPr>
+            <a:r>
+              <a:rPr sz="1200" b="0">
+                <a:solidFill>
+                  <a:srgbClr val="F8FAFC"/>
+                </a:solidFill>
+                <a:latin typeface="Courier New"/>
+              </a:rPr>
+              <a:t> </a:t>
+            </a:r>
+          </a:p>
+          <a:p>
+            <a:pPr>
+              <a:defRPr sz="1200" b="0">
+                <a:solidFill>
+                  <a:srgbClr val="F8FAFC"/>
+                </a:solidFill>
+                <a:latin typeface="Courier New"/>
+              </a:defRPr>
+            </a:pPr>
+            <a:r>
+              <a:rPr sz="1200" b="0">
+                <a:solidFill>
+                  <a:srgbClr val="F8FAFC"/>
+                </a:solidFill>
+                <a:latin typeface="Courier New"/>
+              </a:rPr>
+              <a:t>def _int64_feature(valor):</a:t>
+            </a:r>
+          </a:p>
+          <a:p>
+            <a:pPr>
+              <a:defRPr sz="1200" b="0">
+                <a:solidFill>
+                  <a:srgbClr val="F8FAFC"/>
+                </a:solidFill>
+                <a:latin typeface="Courier New"/>
+              </a:defRPr>
+            </a:pPr>
+            <a:r>
+              <a:rPr sz="1200" b="0">
+                <a:solidFill>
+                  <a:srgbClr val="F8FAFC"/>
+                </a:solidFill>
+                <a:latin typeface="Courier New"/>
+              </a:rPr>
+              <a:t>    return tf.train.Feature(int64_list=tf.train.Int64List(value=[valor]))</a:t>
+            </a:r>
+          </a:p>
+          <a:p>
+            <a:pPr>
+              <a:defRPr sz="1200" b="0">
+                <a:solidFill>
+                  <a:srgbClr val="F8FAFC"/>
+                </a:solidFill>
+                <a:latin typeface="Courier New"/>
+              </a:defRPr>
+            </a:pPr>
+            <a:r>
+              <a:rPr sz="1200" b="0">
+                <a:solidFill>
+                  <a:srgbClr val="F8FAFC"/>
+                </a:solidFill>
+                <a:latin typeface="Courier New"/>
+              </a:rPr>
+              <a:t> </a:t>
+            </a:r>
+          </a:p>
+          <a:p>
+            <a:pPr>
+              <a:defRPr sz="1200" b="0">
+                <a:solidFill>
+                  <a:srgbClr val="F8FAFC"/>
+                </a:solidFill>
+                <a:latin typeface="Courier New"/>
+              </a:defRPr>
+            </a:pPr>
+            <a:r>
+              <a:rPr sz="1200" b="0">
+                <a:solidFill>
+                  <a:srgbClr val="F8FAFC"/>
+                </a:solidFill>
+                <a:latin typeface="Courier New"/>
+              </a:rPr>
+              <a:t>def _float_feature(valor):</a:t>
+            </a:r>
+          </a:p>
+          <a:p>
+            <a:pPr>
+              <a:defRPr sz="1200" b="0">
+                <a:solidFill>
+                  <a:srgbClr val="F8FAFC"/>
+                </a:solidFill>
+                <a:latin typeface="Courier New"/>
+              </a:defRPr>
+            </a:pPr>
+            <a:r>
+              <a:rPr sz="1200" b="0">
+                <a:solidFill>
+                  <a:srgbClr val="F8FAFC"/>
+                </a:solidFill>
+                <a:latin typeface="Courier New"/>
+              </a:rPr>
+              <a:t>    return tf.train.Feature(float_list=tf.train.FloatList(value=[valor]))</a:t>
+            </a:r>
+          </a:p>
+          <a:p>
+            <a:pPr>
+              <a:defRPr sz="1200" b="0">
+                <a:solidFill>
+                  <a:srgbClr val="F8FAFC"/>
+                </a:solidFill>
+                <a:latin typeface="Courier New"/>
+              </a:defRPr>
+            </a:pPr>
+            <a:r>
+              <a:rPr sz="1200" b="0">
+                <a:solidFill>
+                  <a:srgbClr val="F8FAFC"/>
+                </a:solidFill>
+                <a:latin typeface="Courier New"/>
+              </a:rPr>
+              <a:t> </a:t>
+            </a:r>
+          </a:p>
+          <a:p>
+            <a:pPr>
+              <a:defRPr sz="1200" b="0">
+                <a:solidFill>
+                  <a:srgbClr val="F8FAFC"/>
+                </a:solidFill>
+                <a:latin typeface="Courier New"/>
+              </a:defRPr>
+            </a:pPr>
+            <a:r>
+              <a:rPr sz="1200" b="0">
+                <a:solidFill>
+                  <a:srgbClr val="F8FAFC"/>
+                </a:solidFill>
+                <a:latin typeface="Courier New"/>
+              </a:rPr>
+              <a:t>print("helpers de Feature listos: bytes / int64 / float")</a:t>
             </a:r>
           </a:p>
         </p:txBody>

--- a/docs/presentaciones/classes/clase-125-tfrecord-presentacion.pptx
+++ b/docs/presentaciones/classes/clase-125-tfrecord-presentacion.pptx
@@ -3272,7 +3272,7 @@
                 </a:solidFill>
                 <a:latin typeface="Segoe UI"/>
               </a:rPr>
-              <a:t>Parte: 2 — Deep Learning · Fuente: Géron, cap. 13 § The TFRecord Format.  Duración estimada: 60 min.</a:t>
+              <a:t>Parte: 2 — Deep Learning · Fuente: Géron, cap. 13 § The TFRecord Format.  Duración estimada: 60 min. · Nivel: Avanzado</a:t>
             </a:r>
           </a:p>
         </p:txBody>
@@ -3581,7 +3581,7 @@
                 </a:solidFill>
                 <a:latin typeface="Segoe UI"/>
               </a:rPr>
-              <a:t>Parte: 2 — Deep Learning · Fuente: Géron, cap. 13 § The TFRecord Format.  Duración estimada: 60 min.</a:t>
+              <a:t>Parte: 2 — Deep Learning · Fuente: Géron, cap. 13 § The TFRecord Format.  Duración estimada: 60 min. · Nivel: Avanzado</a:t>
             </a:r>
           </a:p>
         </p:txBody>
